--- a/decks/geog-local-place/geog-local-place_ch5_united-kingdom.pptx
+++ b/decks/geog-local-place/geog-local-place_ch5_united-kingdom.pptx
@@ -125,30 +125,30 @@
   <p:extLst>
     <p:ext uri="{521415D9-36F7-43E2-AB2F-B90AF26B5E84}">
       <p14:sectionLst xmlns:p14="http://schemas.microsoft.com/office/powerpoint/2010/main">
-        <p14:section name="Opening" id="{209c53ac-2442-9e0d-17fe-fb1cecf87c11}">
+        <p14:section name="Opening" id="{d3e36fd5-fee8-8a35-7b1b-4b358421b7f3}">
           <p14:sldIdLst>
             <p14:sldId id="256"/>
           </p14:sldIdLst>
         </p14:section>
-        <p14:section name="Gate" id="{8b72ed9a-45d4-6671-70ee-e1e855cb106d}">
+        <p14:section name="Gate" id="{3e99b94c-9e59-4698-114f-954424e59a0a}">
           <p14:sldIdLst>
             <p14:sldId id="257"/>
             <p14:sldId id="258"/>
           </p14:sldIdLst>
         </p14:section>
-        <p14:section name="Pre-teach" id="{0fa8975e-f424-9b76-babd-5814d9d7d226}">
+        <p14:section name="Pre-teach" id="{829656b2-2e3f-6a31-96c1-ef0c8af52e85}">
           <p14:sldIdLst>
             <p14:sldId id="259"/>
             <p14:sldId id="260"/>
           </p14:sldIdLst>
         </p14:section>
-        <p14:section name="Read-along" id="{40a203ce-1494-6db6-dbc9-028db5f41f32}">
+        <p14:section name="Read-along" id="{22918309-e17b-0bfa-236d-a7a9d4c59b17}">
           <p14:sldIdLst>
             <p14:sldId id="261"/>
             <p14:sldId id="262"/>
           </p14:sldIdLst>
         </p14:section>
-        <p14:section name="Teach" id="{ad1ac621-c63e-458c-b820-091d3dc98790}">
+        <p14:section name="Teach" id="{30f5d4a7-cb50-0ec4-183c-02accbe58c4e}">
           <p14:sldIdLst>
             <p14:sldId id="263"/>
             <p14:sldId id="264"/>
@@ -157,19 +157,19 @@
             <p14:sldId id="267"/>
           </p14:sldIdLst>
         </p14:section>
-        <p14:section name="Routes" id="{78c14a65-cda7-ebc5-41b1-126678a5ddb7}">
+        <p14:section name="Routes" id="{e697ee9f-1e4e-6147-c984-f28ce4c42ce3}">
           <p14:sldIdLst>
             <p14:sldId id="268"/>
             <p14:sldId id="269"/>
             <p14:sldId id="270"/>
           </p14:sldIdLst>
         </p14:section>
-        <p14:section name="Close" id="{ba504270-77b9-c8b1-94fb-2bda23b31f06}">
+        <p14:section name="Close" id="{3e1bf146-e7d3-4976-7df7-bfec77769a6a}">
           <p14:sldIdLst>
             <p14:sldId id="271"/>
           </p14:sldIdLst>
         </p14:section>
-        <p14:section name="Answers" id="{7a58a677-2519-f9da-5c61-88f1ce2a69b6}">
+        <p14:section name="Answers" id="{335cdd87-c430-2ba7-4423-2a09a86d730e}">
           <p14:sldIdLst>
             <p14:sldId id="272"/>
             <p14:sldId id="273"/>
